--- a/AI4All-autoencoders-diffusion-video.pptx
+++ b/AI4All-autoencoders-diffusion-video.pptx
@@ -5,7 +5,7 @@
     <p:sldMasterId id="2147483648" r:id="rId1"/>
   </p:sldMasterIdLst>
   <p:notesMasterIdLst>
-    <p:notesMasterId r:id="rId18"/>
+    <p:notesMasterId r:id="rId17"/>
   </p:notesMasterIdLst>
   <p:sldIdLst>
     <p:sldId id="256" r:id="rId2"/>
@@ -16,14 +16,13 @@
     <p:sldId id="886" r:id="rId7"/>
     <p:sldId id="898" r:id="rId8"/>
     <p:sldId id="274" r:id="rId9"/>
-    <p:sldId id="278" r:id="rId10"/>
-    <p:sldId id="897" r:id="rId11"/>
-    <p:sldId id="896" r:id="rId12"/>
-    <p:sldId id="895" r:id="rId13"/>
-    <p:sldId id="900" r:id="rId14"/>
-    <p:sldId id="899" r:id="rId15"/>
-    <p:sldId id="901" r:id="rId16"/>
-    <p:sldId id="894" r:id="rId17"/>
+    <p:sldId id="897" r:id="rId10"/>
+    <p:sldId id="896" r:id="rId11"/>
+    <p:sldId id="895" r:id="rId12"/>
+    <p:sldId id="900" r:id="rId13"/>
+    <p:sldId id="899" r:id="rId14"/>
+    <p:sldId id="901" r:id="rId15"/>
+    <p:sldId id="894" r:id="rId16"/>
   </p:sldIdLst>
   <p:sldSz cx="12192000" cy="6858000"/>
   <p:notesSz cx="6858000" cy="9144000"/>
@@ -139,7 +138,6 @@
             <p14:sldId id="886"/>
             <p14:sldId id="898"/>
             <p14:sldId id="274"/>
-            <p14:sldId id="278"/>
             <p14:sldId id="897"/>
             <p14:sldId id="896"/>
             <p14:sldId id="895"/>
@@ -12298,102 +12296,6 @@
           <p:cNvPr id="2" name="Title 1">
             <a:extLst>
               <a:ext uri="{FF2B5EF4-FFF2-40B4-BE49-F238E27FC236}">
-                <a16:creationId xmlns:a16="http://schemas.microsoft.com/office/drawing/2014/main" id="{76140CEE-D27C-2BD3-0982-4909BCAB28CE}"/>
-              </a:ext>
-            </a:extLst>
-          </p:cNvPr>
-          <p:cNvSpPr>
-            <a:spLocks noGrp="1"/>
-          </p:cNvSpPr>
-          <p:nvPr>
-            <p:ph type="title"/>
-          </p:nvPr>
-        </p:nvSpPr>
-        <p:spPr>
-          <a:xfrm>
-            <a:off x="838200" y="63200"/>
-            <a:ext cx="10515600" cy="1325563"/>
-          </a:xfrm>
-        </p:spPr>
-        <p:txBody>
-          <a:bodyPr/>
-          <a:lstStyle/>
-          <a:p>
-            <a:pPr algn="ctr"/>
-            <a:r>
-              <a:rPr lang="en-US" dirty="0"/>
-              <a:t>Embedding Time using sinusoids</a:t>
-            </a:r>
-          </a:p>
-        </p:txBody>
-      </p:sp>
-      <p:pic>
-        <p:nvPicPr>
-          <p:cNvPr id="5" name="Content Placeholder 4">
-            <a:extLst>
-              <a:ext uri="{FF2B5EF4-FFF2-40B4-BE49-F238E27FC236}">
-                <a16:creationId xmlns:a16="http://schemas.microsoft.com/office/drawing/2014/main" id="{424C6850-888E-FDFB-32D5-CA069085307D}"/>
-              </a:ext>
-            </a:extLst>
-          </p:cNvPr>
-          <p:cNvPicPr>
-            <a:picLocks noGrp="1" noChangeAspect="1"/>
-          </p:cNvPicPr>
-          <p:nvPr>
-            <p:ph idx="1"/>
-          </p:nvPr>
-        </p:nvPicPr>
-        <p:blipFill>
-          <a:blip r:embed="rId2"/>
-          <a:stretch>
-            <a:fillRect/>
-          </a:stretch>
-        </p:blipFill>
-        <p:spPr>
-          <a:xfrm>
-            <a:off x="386783" y="2330075"/>
-            <a:ext cx="11660804" cy="1624972"/>
-          </a:xfrm>
-          <a:prstGeom prst="rect">
-            <a:avLst/>
-          </a:prstGeom>
-        </p:spPr>
-      </p:pic>
-    </p:spTree>
-    <p:extLst>
-      <p:ext uri="{BB962C8B-B14F-4D97-AF65-F5344CB8AC3E}">
-        <p14:creationId xmlns:p14="http://schemas.microsoft.com/office/powerpoint/2010/main" val="248987341"/>
-      </p:ext>
-    </p:extLst>
-  </p:cSld>
-  <p:clrMapOvr>
-    <a:masterClrMapping/>
-  </p:clrMapOvr>
-</p:sld>
-</file>
-
-<file path=ppt/slides/slide11.xml><?xml version="1.0" encoding="utf-8"?>
-<p:sld xmlns:a="http://schemas.openxmlformats.org/drawingml/2006/main" xmlns:r="http://schemas.openxmlformats.org/officeDocument/2006/relationships" xmlns:p="http://schemas.openxmlformats.org/presentationml/2006/main">
-  <p:cSld>
-    <p:spTree>
-      <p:nvGrpSpPr>
-        <p:cNvPr id="1" name=""/>
-        <p:cNvGrpSpPr/>
-        <p:nvPr/>
-      </p:nvGrpSpPr>
-      <p:grpSpPr>
-        <a:xfrm>
-          <a:off x="0" y="0"/>
-          <a:ext cx="0" cy="0"/>
-          <a:chOff x="0" y="0"/>
-          <a:chExt cx="0" cy="0"/>
-        </a:xfrm>
-      </p:grpSpPr>
-      <p:sp>
-        <p:nvSpPr>
-          <p:cNvPr id="2" name="Title 1">
-            <a:extLst>
-              <a:ext uri="{FF2B5EF4-FFF2-40B4-BE49-F238E27FC236}">
                 <a16:creationId xmlns:a16="http://schemas.microsoft.com/office/drawing/2014/main" id="{C950BE71-CE0B-048C-E295-1BC56DDC28D5}"/>
               </a:ext>
             </a:extLst>
@@ -12712,7 +12614,7 @@
 </p:sld>
 </file>
 
-<file path=ppt/slides/slide12.xml><?xml version="1.0" encoding="utf-8"?>
+<file path=ppt/slides/slide11.xml><?xml version="1.0" encoding="utf-8"?>
 <p:sld xmlns:a="http://schemas.openxmlformats.org/drawingml/2006/main" xmlns:r="http://schemas.openxmlformats.org/officeDocument/2006/relationships" xmlns:p="http://schemas.openxmlformats.org/presentationml/2006/main">
   <p:cSld>
     <p:spTree>
@@ -12932,7 +12834,7 @@
 </p:sld>
 </file>
 
-<file path=ppt/slides/slide13.xml><?xml version="1.0" encoding="utf-8"?>
+<file path=ppt/slides/slide12.xml><?xml version="1.0" encoding="utf-8"?>
 <p:sld xmlns:a="http://schemas.openxmlformats.org/drawingml/2006/main" xmlns:r="http://schemas.openxmlformats.org/officeDocument/2006/relationships" xmlns:p="http://schemas.openxmlformats.org/presentationml/2006/main">
   <p:cSld>
     <p:spTree>
@@ -13295,7 +13197,7 @@
 </p:sld>
 </file>
 
-<file path=ppt/slides/slide14.xml><?xml version="1.0" encoding="utf-8"?>
+<file path=ppt/slides/slide13.xml><?xml version="1.0" encoding="utf-8"?>
 <p:sld xmlns:a="http://schemas.openxmlformats.org/drawingml/2006/main" xmlns:r="http://schemas.openxmlformats.org/officeDocument/2006/relationships" xmlns:p="http://schemas.openxmlformats.org/presentationml/2006/main">
   <p:cSld>
     <p:spTree>
@@ -13357,7 +13259,7 @@
 </p:sld>
 </file>
 
-<file path=ppt/slides/slide15.xml><?xml version="1.0" encoding="utf-8"?>
+<file path=ppt/slides/slide14.xml><?xml version="1.0" encoding="utf-8"?>
 <p:sld xmlns:a="http://schemas.openxmlformats.org/drawingml/2006/main" xmlns:r="http://schemas.openxmlformats.org/officeDocument/2006/relationships" xmlns:p="http://schemas.openxmlformats.org/presentationml/2006/main">
   <p:cSld>
     <p:spTree>
@@ -13555,7 +13457,7 @@
 </p:sld>
 </file>
 
-<file path=ppt/slides/slide16.xml><?xml version="1.0" encoding="utf-8"?>
+<file path=ppt/slides/slide15.xml><?xml version="1.0" encoding="utf-8"?>
 <p:sld xmlns:a="http://schemas.openxmlformats.org/drawingml/2006/main" xmlns:r="http://schemas.openxmlformats.org/officeDocument/2006/relationships" xmlns:p="http://schemas.openxmlformats.org/presentationml/2006/main">
   <p:cSld>
     <p:spTree>
@@ -15667,12 +15569,46 @@
           <a:chExt cx="0" cy="0"/>
         </a:xfrm>
       </p:grpSpPr>
+      <p:sp>
+        <p:nvSpPr>
+          <p:cNvPr id="2" name="Title 1">
+            <a:extLst>
+              <a:ext uri="{FF2B5EF4-FFF2-40B4-BE49-F238E27FC236}">
+                <a16:creationId xmlns:a16="http://schemas.microsoft.com/office/drawing/2014/main" id="{76140CEE-D27C-2BD3-0982-4909BCAB28CE}"/>
+              </a:ext>
+            </a:extLst>
+          </p:cNvPr>
+          <p:cNvSpPr>
+            <a:spLocks noGrp="1"/>
+          </p:cNvSpPr>
+          <p:nvPr>
+            <p:ph type="title"/>
+          </p:nvPr>
+        </p:nvSpPr>
+        <p:spPr>
+          <a:xfrm>
+            <a:off x="838200" y="63200"/>
+            <a:ext cx="10515600" cy="1325563"/>
+          </a:xfrm>
+        </p:spPr>
+        <p:txBody>
+          <a:bodyPr/>
+          <a:lstStyle/>
+          <a:p>
+            <a:pPr algn="ctr"/>
+            <a:r>
+              <a:rPr lang="en-US" dirty="0"/>
+              <a:t>Embedding Time using sinusoids</a:t>
+            </a:r>
+          </a:p>
+        </p:txBody>
+      </p:sp>
       <p:pic>
         <p:nvPicPr>
-          <p:cNvPr id="9" name="Content Placeholder 8">
+          <p:cNvPr id="5" name="Content Placeholder 4">
             <a:extLst>
               <a:ext uri="{FF2B5EF4-FFF2-40B4-BE49-F238E27FC236}">
-                <a16:creationId xmlns:a16="http://schemas.microsoft.com/office/drawing/2014/main" id="{F9C0F54D-088B-B9B4-0E6E-5D8E67D82BBA}"/>
+                <a16:creationId xmlns:a16="http://schemas.microsoft.com/office/drawing/2014/main" id="{424C6850-888E-FDFB-32D5-CA069085307D}"/>
               </a:ext>
             </a:extLst>
           </p:cNvPr>
@@ -15691,91 +15627,18 @@
         </p:blipFill>
         <p:spPr>
           <a:xfrm>
-            <a:off x="643467" y="1316142"/>
-            <a:ext cx="10905066" cy="4225714"/>
+            <a:off x="386783" y="2330075"/>
+            <a:ext cx="11660804" cy="1624972"/>
           </a:xfrm>
           <a:prstGeom prst="rect">
             <a:avLst/>
           </a:prstGeom>
         </p:spPr>
       </p:pic>
-      <p:sp>
-        <p:nvSpPr>
-          <p:cNvPr id="2" name="TextBox 1">
-            <a:extLst>
-              <a:ext uri="{FF2B5EF4-FFF2-40B4-BE49-F238E27FC236}">
-                <a16:creationId xmlns:a16="http://schemas.microsoft.com/office/drawing/2014/main" id="{6F48FF2B-58BF-1BFF-58E1-4F2EC8C1388B}"/>
-              </a:ext>
-            </a:extLst>
-          </p:cNvPr>
-          <p:cNvSpPr txBox="1"/>
-          <p:nvPr/>
-        </p:nvSpPr>
-        <p:spPr>
-          <a:xfrm>
-            <a:off x="8428008" y="5793649"/>
-            <a:ext cx="2908553" cy="369332"/>
-          </a:xfrm>
-          <a:prstGeom prst="rect">
-            <a:avLst/>
-          </a:prstGeom>
-          <a:noFill/>
-        </p:spPr>
-        <p:txBody>
-          <a:bodyPr wrap="none" rtlCol="0">
-            <a:spAutoFit/>
-          </a:bodyPr>
-          <a:lstStyle/>
-          <a:p>
-            <a:r>
-              <a:rPr lang="en-US" dirty="0">
-                <a:hlinkClick r:id="rId3"/>
-              </a:rPr>
-              <a:t>https://visionbook.mit.edu/</a:t>
-            </a:r>
-            <a:endParaRPr lang="en-US" dirty="0"/>
-          </a:p>
-        </p:txBody>
-      </p:sp>
-      <p:sp>
-        <p:nvSpPr>
-          <p:cNvPr id="4" name="TextBox 3">
-            <a:extLst>
-              <a:ext uri="{FF2B5EF4-FFF2-40B4-BE49-F238E27FC236}">
-                <a16:creationId xmlns:a16="http://schemas.microsoft.com/office/drawing/2014/main" id="{C3DD3E97-5627-BD00-4A92-C0D99E706D9F}"/>
-              </a:ext>
-            </a:extLst>
-          </p:cNvPr>
-          <p:cNvSpPr txBox="1"/>
-          <p:nvPr/>
-        </p:nvSpPr>
-        <p:spPr>
-          <a:xfrm>
-            <a:off x="1340650" y="418018"/>
-            <a:ext cx="8541634" cy="646331"/>
-          </a:xfrm>
-          <a:prstGeom prst="rect">
-            <a:avLst/>
-          </a:prstGeom>
-          <a:noFill/>
-        </p:spPr>
-        <p:txBody>
-          <a:bodyPr wrap="none" rtlCol="0">
-            <a:spAutoFit/>
-          </a:bodyPr>
-          <a:lstStyle/>
-          <a:p>
-            <a:r>
-              <a:rPr lang="en-US" sz="3600" dirty="0"/>
-              <a:t>Use an Auto-encoder as a Diffusion Model</a:t>
-            </a:r>
-          </a:p>
-        </p:txBody>
-      </p:sp>
     </p:spTree>
     <p:extLst>
       <p:ext uri="{BB962C8B-B14F-4D97-AF65-F5344CB8AC3E}">
-        <p14:creationId xmlns:p14="http://schemas.microsoft.com/office/powerpoint/2010/main" val="1905822117"/>
+        <p14:creationId xmlns:p14="http://schemas.microsoft.com/office/powerpoint/2010/main" val="248987341"/>
       </p:ext>
     </p:extLst>
   </p:cSld>
